--- a/data-eng/decks/w5d5s0.pptx
+++ b/data-eng/decks/w5d5s0.pptx
@@ -7017,7 +7017,7 @@
                 <a:ea typeface="Pretendard"/>
                 <a:cs typeface="Pretendard"/>
               </a:rPr>
-              <a:t>1 5-4 확인</a:t>
+              <a:t>1. 5-4 확인</a:t>
             </a:r>
           </a:p>
         </p:txBody>
@@ -7181,7 +7181,7 @@
                 <a:ea typeface="Pretendard"/>
                 <a:cs typeface="Pretendard"/>
               </a:rPr>
-              <a:t>2 4주차 멈춤</a:t>
+              <a:t>2. 4주차 멈춤</a:t>
             </a:r>
           </a:p>
         </p:txBody>
@@ -7345,7 +7345,7 @@
                 <a:ea typeface="Pretendard"/>
                 <a:cs typeface="Pretendard"/>
               </a:rPr>
-              <a:t>3 4040 열기</a:t>
+              <a:t>3. 4040 열기</a:t>
             </a:r>
           </a:p>
         </p:txBody>
@@ -7509,7 +7509,7 @@
                 <a:ea typeface="Pretendard"/>
                 <a:cs typeface="Pretendard"/>
               </a:rPr>
-              <a:t>4 테이블 확인</a:t>
+              <a:t>4. 테이블 확인</a:t>
             </a:r>
           </a:p>
         </p:txBody>
@@ -7673,7 +7673,7 @@
                 <a:ea typeface="Pretendard"/>
                 <a:cs typeface="Pretendard"/>
               </a:rPr>
-              <a:t>5 오늘 만들 것</a:t>
+              <a:t>5. 오늘 만들 것</a:t>
             </a:r>
           </a:p>
         </p:txBody>
@@ -7837,7 +7837,7 @@
                 <a:ea typeface="Pretendard"/>
                 <a:cs typeface="Pretendard"/>
               </a:rPr>
-              <a:t>6 환경 재설정</a:t>
+              <a:t>6. 환경 재설정</a:t>
             </a:r>
           </a:p>
         </p:txBody>
